--- a/assets/decks/Module_11_Flavor_and_Menu_Development.pptx
+++ b/assets/decks/Module_11_Flavor_and_Menu_Development.pptx
@@ -7844,6 +7844,7 @@
                   <a:srgbClr val="C0392B"/>
                 </a:solidFill>
                 <a:latin typeface="Calibri"/>
+                <a:hlinkClick r:id="rId2"/>
               </a:rPr>
               <a:t>Ethan Chlebowski (the 'why' behind cooking)</a:t>
             </a:r>
@@ -7886,6 +7887,7 @@
                   <a:srgbClr val="B5651D"/>
                 </a:solidFill>
                 <a:latin typeface="Calibri"/>
+                <a:hlinkClick r:id="rId2"/>
               </a:rPr>
               <a:t>https://www.youtube.com/@EthanChlebowski</a:t>
             </a:r>
@@ -8062,6 +8064,7 @@
                   <a:srgbClr val="C0392B"/>
                 </a:solidFill>
                 <a:latin typeface="Calibri"/>
+                <a:hlinkClick r:id="rId3"/>
               </a:rPr>
               <a:t>Adam Ragusea (practical home technique)</a:t>
             </a:r>
@@ -8104,6 +8107,7 @@
                   <a:srgbClr val="B5651D"/>
                 </a:solidFill>
                 <a:latin typeface="Calibri"/>
+                <a:hlinkClick r:id="rId3"/>
               </a:rPr>
               <a:t>https://www.youtube.com/@aragusea</a:t>
             </a:r>
@@ -8280,6 +8284,7 @@
                   <a:srgbClr val="C0392B"/>
                 </a:solidFill>
                 <a:latin typeface="Calibri"/>
+                <a:hlinkClick r:id="rId4"/>
               </a:rPr>
               <a:t>Internet Shaquille (efficiency &amp; fundamentals)</a:t>
             </a:r>
@@ -8322,6 +8327,7 @@
                   <a:srgbClr val="B5651D"/>
                 </a:solidFill>
                 <a:latin typeface="Calibri"/>
+                <a:hlinkClick r:id="rId4"/>
               </a:rPr>
               <a:t>https://www.youtube.com/@internetshaquille</a:t>
             </a:r>
